--- a/LabBook_10.pptx
+++ b/LabBook_10.pptx
@@ -233,7 +233,7 @@
           <a:p>
             <a:fld id="{8438F8DC-35B0-48E6-A86E-42F1F08DD00F}" type="datetimeFigureOut">
               <a:rPr lang="es-ES" smtClean="0"/>
-              <a:t>16/02/2026</a:t>
+              <a:t>28/09/2026</a:t>
             </a:fld>
             <a:endParaRPr lang="es-ES"/>
           </a:p>
@@ -410,7 +410,7 @@
           <a:p>
             <a:fld id="{FACBDC12-F39B-4B97-8F4D-6734F9D366FF}" type="datetimeFigureOut">
               <a:rPr lang="es-ES" smtClean="0"/>
-              <a:t>16/02/2026</a:t>
+              <a:t>28/09/2026</a:t>
             </a:fld>
             <a:endParaRPr lang="es-ES"/>
           </a:p>
@@ -1989,10 +1989,10 @@
           <p:nvPr userDrawn="1"/>
         </p:nvPicPr>
         <p:blipFill>
-          <a:blip r:embed="rId3">
+          <a:blip>
             <a:extLst>
               <a:ext uri="{96DAC541-7B7A-43D3-8B79-37D633B846F1}">
-                <asvg:svgBlip xmlns:asvg="http://schemas.microsoft.com/office/drawing/2016/SVG/main" r:embed="rId4"/>
+                <asvg:svgBlip xmlns:asvg="http://schemas.microsoft.com/office/drawing/2016/SVG/main" r:embed="rId3"/>
               </a:ext>
             </a:extLst>
           </a:blip>
@@ -2153,10 +2153,10 @@
           <p:nvPr userDrawn="1"/>
         </p:nvPicPr>
         <p:blipFill>
-          <a:blip r:embed="rId3">
+          <a:blip>
             <a:extLst>
               <a:ext uri="{96DAC541-7B7A-43D3-8B79-37D633B846F1}">
-                <asvg:svgBlip xmlns:asvg="http://schemas.microsoft.com/office/drawing/2016/SVG/main" r:embed="rId4"/>
+                <asvg:svgBlip xmlns:asvg="http://schemas.microsoft.com/office/drawing/2016/SVG/main" r:embed="rId3"/>
               </a:ext>
             </a:extLst>
           </a:blip>
@@ -2889,10 +2889,10 @@
           <p:nvPr/>
         </p:nvPicPr>
         <p:blipFill>
-          <a:blip r:embed="rId2">
+          <a:blip>
             <a:extLst>
               <a:ext uri="{96DAC541-7B7A-43D3-8B79-37D633B846F1}">
-                <asvg:svgBlip xmlns:asvg="http://schemas.microsoft.com/office/drawing/2016/SVG/main" r:embed="rId3"/>
+                <asvg:svgBlip xmlns:asvg="http://schemas.microsoft.com/office/drawing/2016/SVG/main" r:embed="rId2"/>
               </a:ext>
             </a:extLst>
           </a:blip>
@@ -3407,8 +3407,8 @@
         </p:nvSpPr>
         <p:spPr>
           <a:xfrm>
-            <a:off x="1091131" y="4210910"/>
-            <a:ext cx="577850" cy="454025"/>
+            <a:off x="795654" y="3983757"/>
+            <a:ext cx="1010309" cy="875240"/>
           </a:xfrm>
           <a:prstGeom prst="rect">
             <a:avLst/>
@@ -3435,10 +3435,6 @@
               </a:rPr>
               <a:t>h</a:t>
             </a:r>
-            <a:endParaRPr sz="1400">
-              <a:latin typeface="Calibri"/>
-              <a:cs typeface="Calibri"/>
-            </a:endParaRPr>
           </a:p>
           <a:p>
             <a:pPr marR="5080" algn="ctr">
@@ -3484,7 +3480,45 @@
               </a:rPr>
               <a:t>)</a:t>
             </a:r>
-            <a:endParaRPr sz="1400">
+            <a:endParaRPr lang="es-ES" sz="1400" dirty="0">
+              <a:latin typeface="Calibri"/>
+              <a:cs typeface="Calibri"/>
+            </a:endParaRPr>
+          </a:p>
+          <a:p>
+            <a:pPr marR="5080" algn="ctr">
+              <a:lnSpc>
+                <a:spcPct val="100000"/>
+              </a:lnSpc>
+              <a:spcBef>
+                <a:spcPts val="5"/>
+              </a:spcBef>
+            </a:pPr>
+            <a:r>
+              <a:rPr lang="es-CO" sz="1400" dirty="0">
+                <a:latin typeface="Calibri"/>
+                <a:cs typeface="Calibri"/>
+              </a:rPr>
+              <a:t>/</a:t>
+            </a:r>
+          </a:p>
+          <a:p>
+            <a:pPr marR="5080" algn="ctr">
+              <a:lnSpc>
+                <a:spcPct val="100000"/>
+              </a:lnSpc>
+              <a:spcBef>
+                <a:spcPts val="5"/>
+              </a:spcBef>
+            </a:pPr>
+            <a:r>
+              <a:rPr lang="es-CO" sz="1400" dirty="0" err="1">
+                <a:latin typeface="Calibri"/>
+                <a:cs typeface="Calibri"/>
+              </a:rPr>
+              <a:t>thickness</a:t>
+            </a:r>
+            <a:endParaRPr sz="1400" dirty="0">
               <a:latin typeface="Calibri"/>
               <a:cs typeface="Calibri"/>
             </a:endParaRPr>
@@ -4812,10 +4846,10 @@
           <p:nvPr/>
         </p:nvPicPr>
         <p:blipFill>
-          <a:blip r:embed="rId3">
+          <a:blip>
             <a:extLst>
               <a:ext uri="{96DAC541-7B7A-43D3-8B79-37D633B846F1}">
-                <asvg:svgBlip xmlns:asvg="http://schemas.microsoft.com/office/drawing/2016/SVG/main" r:embed="rId4"/>
+                <asvg:svgBlip xmlns:asvg="http://schemas.microsoft.com/office/drawing/2016/SVG/main" r:embed="rId3"/>
               </a:ext>
             </a:extLst>
           </a:blip>
@@ -5337,10 +5371,10 @@
           <p:nvPr/>
         </p:nvPicPr>
         <p:blipFill>
-          <a:blip r:embed="rId3">
+          <a:blip>
             <a:extLst>
               <a:ext uri="{96DAC541-7B7A-43D3-8B79-37D633B846F1}">
-                <asvg:svgBlip xmlns:asvg="http://schemas.microsoft.com/office/drawing/2016/SVG/main" r:embed="rId4"/>
+                <asvg:svgBlip xmlns:asvg="http://schemas.microsoft.com/office/drawing/2016/SVG/main" r:embed="rId3"/>
               </a:ext>
             </a:extLst>
           </a:blip>
@@ -5875,10 +5909,10 @@
           <p:nvPr/>
         </p:nvPicPr>
         <p:blipFill>
-          <a:blip r:embed="rId3">
+          <a:blip>
             <a:extLst>
               <a:ext uri="{96DAC541-7B7A-43D3-8B79-37D633B846F1}">
-                <asvg:svgBlip xmlns:asvg="http://schemas.microsoft.com/office/drawing/2016/SVG/main" r:embed="rId4"/>
+                <asvg:svgBlip xmlns:asvg="http://schemas.microsoft.com/office/drawing/2016/SVG/main" r:embed="rId3"/>
               </a:ext>
             </a:extLst>
           </a:blip>
@@ -6292,10 +6326,10 @@
           <p:nvPr/>
         </p:nvPicPr>
         <p:blipFill>
-          <a:blip r:embed="rId3">
+          <a:blip>
             <a:extLst>
               <a:ext uri="{96DAC541-7B7A-43D3-8B79-37D633B846F1}">
-                <asvg:svgBlip xmlns:asvg="http://schemas.microsoft.com/office/drawing/2016/SVG/main" r:embed="rId4"/>
+                <asvg:svgBlip xmlns:asvg="http://schemas.microsoft.com/office/drawing/2016/SVG/main" r:embed="rId3"/>
               </a:ext>
             </a:extLst>
           </a:blip>
@@ -7456,10 +7490,10 @@
           <p:nvPr/>
         </p:nvPicPr>
         <p:blipFill>
-          <a:blip r:embed="rId3">
+          <a:blip>
             <a:extLst>
               <a:ext uri="{96DAC541-7B7A-43D3-8B79-37D633B846F1}">
-                <asvg:svgBlip xmlns:asvg="http://schemas.microsoft.com/office/drawing/2016/SVG/main" r:embed="rId4"/>
+                <asvg:svgBlip xmlns:asvg="http://schemas.microsoft.com/office/drawing/2016/SVG/main" r:embed="rId3"/>
               </a:ext>
             </a:extLst>
           </a:blip>

--- a/LabBook_10.pptx
+++ b/LabBook_10.pptx
@@ -5,20 +5,19 @@
     <p:sldMasterId id="2147483648" r:id="rId1"/>
   </p:sldMasterIdLst>
   <p:notesMasterIdLst>
-    <p:notesMasterId r:id="rId10"/>
+    <p:notesMasterId r:id="rId9"/>
   </p:notesMasterIdLst>
   <p:handoutMasterIdLst>
-    <p:handoutMasterId r:id="rId11"/>
+    <p:handoutMasterId r:id="rId10"/>
   </p:handoutMasterIdLst>
   <p:sldIdLst>
     <p:sldId id="256" r:id="rId2"/>
     <p:sldId id="295" r:id="rId3"/>
     <p:sldId id="290" r:id="rId4"/>
-    <p:sldId id="291" r:id="rId5"/>
-    <p:sldId id="292" r:id="rId6"/>
+    <p:sldId id="292" r:id="rId5"/>
+    <p:sldId id="291" r:id="rId6"/>
     <p:sldId id="297" r:id="rId7"/>
-    <p:sldId id="293" r:id="rId8"/>
-    <p:sldId id="288" r:id="rId9"/>
+    <p:sldId id="288" r:id="rId8"/>
   </p:sldIdLst>
   <p:sldSz cx="12192000" cy="6858000"/>
   <p:notesSz cx="12192000" cy="6858000"/>
@@ -769,7 +768,7 @@
         <p:cNvPr id="1" name="">
           <a:extLst>
             <a:ext uri="{FF2B5EF4-FFF2-40B4-BE49-F238E27FC236}">
-              <a16:creationId xmlns:a16="http://schemas.microsoft.com/office/drawing/2014/main" id="{4E3C5711-C157-AA5E-1EA1-9F4C3F40B90E}"/>
+              <a16:creationId xmlns:a16="http://schemas.microsoft.com/office/drawing/2014/main" id="{95993BBE-3704-D894-1C10-5488EE611F08}"/>
             </a:ext>
           </a:extLst>
         </p:cNvPr>
@@ -789,7 +788,7 @@
           <p:cNvPr id="2" name="Marcador de imagen de diapositiva 1">
             <a:extLst>
               <a:ext uri="{FF2B5EF4-FFF2-40B4-BE49-F238E27FC236}">
-                <a16:creationId xmlns:a16="http://schemas.microsoft.com/office/drawing/2014/main" id="{FFA117F6-F66D-FFD4-422F-EBD94B31F3F1}"/>
+                <a16:creationId xmlns:a16="http://schemas.microsoft.com/office/drawing/2014/main" id="{19BB04E2-F70F-42F7-9964-3D274C49FB9C}"/>
               </a:ext>
             </a:extLst>
           </p:cNvPr>
@@ -807,7 +806,7 @@
           <p:cNvPr id="3" name="Marcador de notas 2">
             <a:extLst>
               <a:ext uri="{FF2B5EF4-FFF2-40B4-BE49-F238E27FC236}">
-                <a16:creationId xmlns:a16="http://schemas.microsoft.com/office/drawing/2014/main" id="{02B512FE-9F6C-4ABD-23FA-CA518B458D1F}"/>
+                <a16:creationId xmlns:a16="http://schemas.microsoft.com/office/drawing/2014/main" id="{F6664AEC-7D1D-9DDC-3B94-3AE8450C7E5E}"/>
               </a:ext>
             </a:extLst>
           </p:cNvPr>
@@ -832,7 +831,7 @@
           <p:cNvPr id="4" name="Marcador de número de diapositiva 3">
             <a:extLst>
               <a:ext uri="{FF2B5EF4-FFF2-40B4-BE49-F238E27FC236}">
-                <a16:creationId xmlns:a16="http://schemas.microsoft.com/office/drawing/2014/main" id="{9624E7A5-CBFC-658B-8E88-8AF8084D5BC4}"/>
+                <a16:creationId xmlns:a16="http://schemas.microsoft.com/office/drawing/2014/main" id="{E8F62EEB-2D30-2026-D252-4267AF688251}"/>
               </a:ext>
             </a:extLst>
           </p:cNvPr>
@@ -859,7 +858,7 @@
     </p:spTree>
     <p:extLst>
       <p:ext uri="{BB962C8B-B14F-4D97-AF65-F5344CB8AC3E}">
-        <p14:creationId xmlns:p14="http://schemas.microsoft.com/office/powerpoint/2010/main" val="1832961436"/>
+        <p14:creationId xmlns:p14="http://schemas.microsoft.com/office/powerpoint/2010/main" val="4116079046"/>
       </p:ext>
     </p:extLst>
   </p:cSld>
@@ -877,7 +876,7 @@
         <p:cNvPr id="1" name="">
           <a:extLst>
             <a:ext uri="{FF2B5EF4-FFF2-40B4-BE49-F238E27FC236}">
-              <a16:creationId xmlns:a16="http://schemas.microsoft.com/office/drawing/2014/main" id="{95993BBE-3704-D894-1C10-5488EE611F08}"/>
+              <a16:creationId xmlns:a16="http://schemas.microsoft.com/office/drawing/2014/main" id="{4E3C5711-C157-AA5E-1EA1-9F4C3F40B90E}"/>
             </a:ext>
           </a:extLst>
         </p:cNvPr>
@@ -897,7 +896,7 @@
           <p:cNvPr id="2" name="Marcador de imagen de diapositiva 1">
             <a:extLst>
               <a:ext uri="{FF2B5EF4-FFF2-40B4-BE49-F238E27FC236}">
-                <a16:creationId xmlns:a16="http://schemas.microsoft.com/office/drawing/2014/main" id="{19BB04E2-F70F-42F7-9964-3D274C49FB9C}"/>
+                <a16:creationId xmlns:a16="http://schemas.microsoft.com/office/drawing/2014/main" id="{FFA117F6-F66D-FFD4-422F-EBD94B31F3F1}"/>
               </a:ext>
             </a:extLst>
           </p:cNvPr>
@@ -915,7 +914,7 @@
           <p:cNvPr id="3" name="Marcador de notas 2">
             <a:extLst>
               <a:ext uri="{FF2B5EF4-FFF2-40B4-BE49-F238E27FC236}">
-                <a16:creationId xmlns:a16="http://schemas.microsoft.com/office/drawing/2014/main" id="{F6664AEC-7D1D-9DDC-3B94-3AE8450C7E5E}"/>
+                <a16:creationId xmlns:a16="http://schemas.microsoft.com/office/drawing/2014/main" id="{02B512FE-9F6C-4ABD-23FA-CA518B458D1F}"/>
               </a:ext>
             </a:extLst>
           </p:cNvPr>
@@ -940,7 +939,7 @@
           <p:cNvPr id="4" name="Marcador de número de diapositiva 3">
             <a:extLst>
               <a:ext uri="{FF2B5EF4-FFF2-40B4-BE49-F238E27FC236}">
-                <a16:creationId xmlns:a16="http://schemas.microsoft.com/office/drawing/2014/main" id="{E8F62EEB-2D30-2026-D252-4267AF688251}"/>
+                <a16:creationId xmlns:a16="http://schemas.microsoft.com/office/drawing/2014/main" id="{9624E7A5-CBFC-658B-8E88-8AF8084D5BC4}"/>
               </a:ext>
             </a:extLst>
           </p:cNvPr>
@@ -967,7 +966,7 @@
     </p:spTree>
     <p:extLst>
       <p:ext uri="{BB962C8B-B14F-4D97-AF65-F5344CB8AC3E}">
-        <p14:creationId xmlns:p14="http://schemas.microsoft.com/office/powerpoint/2010/main" val="4116079046"/>
+        <p14:creationId xmlns:p14="http://schemas.microsoft.com/office/powerpoint/2010/main" val="1832961436"/>
       </p:ext>
     </p:extLst>
   </p:cSld>
@@ -1076,114 +1075,6 @@
     <p:extLst>
       <p:ext uri="{BB962C8B-B14F-4D97-AF65-F5344CB8AC3E}">
         <p14:creationId xmlns:p14="http://schemas.microsoft.com/office/powerpoint/2010/main" val="2362315989"/>
-      </p:ext>
-    </p:extLst>
-  </p:cSld>
-  <p:clrMapOvr>
-    <a:masterClrMapping/>
-  </p:clrMapOvr>
-</p:notes>
-</file>
-
-<file path=ppt/notesSlides/notesSlide5.xml><?xml version="1.0" encoding="utf-8"?>
-<p:notes xmlns:a="http://schemas.openxmlformats.org/drawingml/2006/main" xmlns:r="http://schemas.openxmlformats.org/officeDocument/2006/relationships" xmlns:p="http://schemas.openxmlformats.org/presentationml/2006/main">
-  <p:cSld>
-    <p:spTree>
-      <p:nvGrpSpPr>
-        <p:cNvPr id="1" name="">
-          <a:extLst>
-            <a:ext uri="{FF2B5EF4-FFF2-40B4-BE49-F238E27FC236}">
-              <a16:creationId xmlns:a16="http://schemas.microsoft.com/office/drawing/2014/main" id="{7B023B86-D15F-9CD8-C5EA-3EAAD8BACCF7}"/>
-            </a:ext>
-          </a:extLst>
-        </p:cNvPr>
-        <p:cNvGrpSpPr/>
-        <p:nvPr/>
-      </p:nvGrpSpPr>
-      <p:grpSpPr>
-        <a:xfrm>
-          <a:off x="0" y="0"/>
-          <a:ext cx="0" cy="0"/>
-          <a:chOff x="0" y="0"/>
-          <a:chExt cx="0" cy="0"/>
-        </a:xfrm>
-      </p:grpSpPr>
-      <p:sp>
-        <p:nvSpPr>
-          <p:cNvPr id="2" name="Marcador de imagen de diapositiva 1">
-            <a:extLst>
-              <a:ext uri="{FF2B5EF4-FFF2-40B4-BE49-F238E27FC236}">
-                <a16:creationId xmlns:a16="http://schemas.microsoft.com/office/drawing/2014/main" id="{5C73881A-26A5-ECF9-C6F2-3DEFA77AEFCC}"/>
-              </a:ext>
-            </a:extLst>
-          </p:cNvPr>
-          <p:cNvSpPr>
-            <a:spLocks noGrp="1" noRot="1" noChangeAspect="1"/>
-          </p:cNvSpPr>
-          <p:nvPr>
-            <p:ph type="sldImg"/>
-          </p:nvPr>
-        </p:nvSpPr>
-        <p:spPr/>
-      </p:sp>
-      <p:sp>
-        <p:nvSpPr>
-          <p:cNvPr id="3" name="Marcador de notas 2">
-            <a:extLst>
-              <a:ext uri="{FF2B5EF4-FFF2-40B4-BE49-F238E27FC236}">
-                <a16:creationId xmlns:a16="http://schemas.microsoft.com/office/drawing/2014/main" id="{3B7AFC79-4973-3930-959B-AEF8810CFE6A}"/>
-              </a:ext>
-            </a:extLst>
-          </p:cNvPr>
-          <p:cNvSpPr>
-            <a:spLocks noGrp="1"/>
-          </p:cNvSpPr>
-          <p:nvPr>
-            <p:ph type="body" idx="1"/>
-          </p:nvPr>
-        </p:nvSpPr>
-        <p:spPr/>
-        <p:txBody>
-          <a:bodyPr/>
-          <a:lstStyle/>
-          <a:p>
-            <a:endParaRPr lang="es-ES" dirty="0"/>
-          </a:p>
-        </p:txBody>
-      </p:sp>
-      <p:sp>
-        <p:nvSpPr>
-          <p:cNvPr id="4" name="Marcador de número de diapositiva 3">
-            <a:extLst>
-              <a:ext uri="{FF2B5EF4-FFF2-40B4-BE49-F238E27FC236}">
-                <a16:creationId xmlns:a16="http://schemas.microsoft.com/office/drawing/2014/main" id="{8345D0F3-6273-0338-FCDA-175B73D7C9EB}"/>
-              </a:ext>
-            </a:extLst>
-          </p:cNvPr>
-          <p:cNvSpPr>
-            <a:spLocks noGrp="1"/>
-          </p:cNvSpPr>
-          <p:nvPr>
-            <p:ph type="sldNum" sz="quarter" idx="5"/>
-          </p:nvPr>
-        </p:nvSpPr>
-        <p:spPr/>
-        <p:txBody>
-          <a:bodyPr/>
-          <a:lstStyle/>
-          <a:p>
-            <a:fld id="{676223B9-C868-4436-87D9-1A3152E1157A}" type="slidenum">
-              <a:rPr lang="es-ES" smtClean="0"/>
-              <a:t>7</a:t>
-            </a:fld>
-            <a:endParaRPr lang="es-ES"/>
-          </a:p>
-        </p:txBody>
-      </p:sp>
-    </p:spTree>
-    <p:extLst>
-      <p:ext uri="{BB962C8B-B14F-4D97-AF65-F5344CB8AC3E}">
-        <p14:creationId xmlns:p14="http://schemas.microsoft.com/office/powerpoint/2010/main" val="2917382716"/>
       </p:ext>
     </p:extLst>
   </p:cSld>
@@ -3104,7 +2995,16 @@
                 </a:solidFill>
                 <a:sym typeface="Wingdings" pitchFamily="2" charset="2"/>
               </a:rPr>
-              <a:t>Fork the repo: https://github.com/cccanvas-upv/cifoin-lab1.git</a:t>
+              <a:t>Fork the repo: https://github.com/cccanvas-upv/ipsp-lab1.</a:t>
+            </a:r>
+            <a:r>
+              <a:rPr lang="en-US" kern="0">
+                <a:solidFill>
+                  <a:sysClr val="windowText" lastClr="000000"/>
+                </a:solidFill>
+                <a:sym typeface="Wingdings" pitchFamily="2" charset="2"/>
+              </a:rPr>
+              <a:t>git </a:t>
             </a:r>
           </a:p>
           <a:p>
@@ -3112,6 +3012,15 @@
               <a:buFont typeface="Arial" panose="020B0604020202020204" pitchFamily="34" charset="0"/>
               <a:buChar char="•"/>
             </a:pPr>
+            <a:r>
+              <a:rPr lang="en-US" kern="0">
+                <a:solidFill>
+                  <a:sysClr val="windowText" lastClr="000000"/>
+                </a:solidFill>
+                <a:sym typeface="Wingdings" pitchFamily="2" charset="2"/>
+              </a:rPr>
+              <a:t>Clone </a:t>
+            </a:r>
             <a:r>
               <a:rPr lang="en-US" kern="0" dirty="0">
                 <a:solidFill>
@@ -3119,7 +3028,7 @@
                 </a:solidFill>
                 <a:sym typeface="Wingdings" pitchFamily="2" charset="2"/>
               </a:rPr>
-              <a:t>Clone the repo using </a:t>
+              <a:t>the repo using </a:t>
             </a:r>
             <a:r>
               <a:rPr lang="en-US" kern="0" dirty="0" err="1">
@@ -3148,23 +3057,7 @@
                   <a:sysClr val="windowText" lastClr="000000"/>
                 </a:solidFill>
               </a:rPr>
-              <a:t>Run the </a:t>
-            </a:r>
-            <a:r>
-              <a:rPr lang="en-US" kern="0" dirty="0" err="1">
-                <a:solidFill>
-                  <a:sysClr val="windowText" lastClr="000000"/>
-                </a:solidFill>
-              </a:rPr>
-              <a:t>Jupyter</a:t>
-            </a:r>
-            <a:r>
-              <a:rPr lang="en-US" kern="0" dirty="0">
-                <a:solidFill>
-                  <a:sysClr val="windowText" lastClr="000000"/>
-                </a:solidFill>
-              </a:rPr>
-              <a:t> Notebook: </a:t>
+              <a:t>Run the Jupyter Notebook: </a:t>
             </a:r>
           </a:p>
           <a:p>
@@ -5281,6 +5174,401 @@
         <p:cNvPr id="1" name="">
           <a:extLst>
             <a:ext uri="{FF2B5EF4-FFF2-40B4-BE49-F238E27FC236}">
+              <a16:creationId xmlns:a16="http://schemas.microsoft.com/office/drawing/2014/main" id="{0D90AC3D-36B7-D786-3825-B4DD6EADD689}"/>
+            </a:ext>
+          </a:extLst>
+        </p:cNvPr>
+        <p:cNvGrpSpPr/>
+        <p:nvPr/>
+      </p:nvGrpSpPr>
+      <p:grpSpPr>
+        <a:xfrm>
+          <a:off x="0" y="0"/>
+          <a:ext cx="0" cy="0"/>
+          <a:chOff x="0" y="0"/>
+          <a:chExt cx="0" cy="0"/>
+        </a:xfrm>
+      </p:grpSpPr>
+      <p:sp>
+        <p:nvSpPr>
+          <p:cNvPr id="16" name="object 16">
+            <a:extLst>
+              <a:ext uri="{FF2B5EF4-FFF2-40B4-BE49-F238E27FC236}">
+                <a16:creationId xmlns:a16="http://schemas.microsoft.com/office/drawing/2014/main" id="{6AA2E789-F7AE-F068-274C-E0F13A22DBCA}"/>
+              </a:ext>
+            </a:extLst>
+          </p:cNvPr>
+          <p:cNvSpPr txBox="1">
+            <a:spLocks noGrp="1"/>
+          </p:cNvSpPr>
+          <p:nvPr>
+            <p:ph type="title"/>
+          </p:nvPr>
+        </p:nvSpPr>
+        <p:spPr>
+          <a:xfrm>
+            <a:off x="685800" y="408883"/>
+            <a:ext cx="10994410" cy="705321"/>
+          </a:xfrm>
+          <a:prstGeom prst="rect">
+            <a:avLst/>
+          </a:prstGeom>
+        </p:spPr>
+        <p:txBody>
+          <a:bodyPr vert="horz" wrap="square" lIns="0" tIns="12700" rIns="0" bIns="0" rtlCol="0">
+            <a:spAutoFit/>
+          </a:bodyPr>
+          <a:lstStyle/>
+          <a:p>
+            <a:pPr marL="12700">
+              <a:lnSpc>
+                <a:spcPct val="100000"/>
+              </a:lnSpc>
+              <a:spcBef>
+                <a:spcPts val="100"/>
+              </a:spcBef>
+            </a:pPr>
+            <a:r>
+              <a:rPr lang="en-US" sz="2500" dirty="0"/>
+              <a:t>Learning outcome #2 – Width dependence</a:t>
+            </a:r>
+            <a:br>
+              <a:rPr lang="es-ES" sz="2500" spc="-5" dirty="0">
+                <a:latin typeface="+mj-lt"/>
+                <a:cs typeface="Lucida Sans"/>
+              </a:rPr>
+            </a:br>
+            <a:r>
+              <a:rPr lang="en-US" b="0" dirty="0"/>
+              <a:t>Width 0.6 - 1.6 µm (step 0.1 µm) – Wavelength 1.55 µm </a:t>
+            </a:r>
+            <a:endParaRPr sz="2500" b="0" dirty="0">
+              <a:latin typeface="+mj-lt"/>
+              <a:cs typeface="Lucida Sans"/>
+            </a:endParaRPr>
+          </a:p>
+        </p:txBody>
+      </p:sp>
+      <p:pic>
+        <p:nvPicPr>
+          <p:cNvPr id="83" name="Gráfico 82">
+            <a:extLst>
+              <a:ext uri="{FF2B5EF4-FFF2-40B4-BE49-F238E27FC236}">
+                <a16:creationId xmlns:a16="http://schemas.microsoft.com/office/drawing/2014/main" id="{3AEAD01B-7604-8009-5694-A556497AEF25}"/>
+              </a:ext>
+            </a:extLst>
+          </p:cNvPr>
+          <p:cNvPicPr>
+            <a:picLocks noChangeAspect="1"/>
+          </p:cNvPicPr>
+          <p:nvPr/>
+        </p:nvPicPr>
+        <p:blipFill>
+          <a:blip>
+            <a:extLst>
+              <a:ext uri="{96DAC541-7B7A-43D3-8B79-37D633B846F1}">
+                <asvg:svgBlip xmlns:asvg="http://schemas.microsoft.com/office/drawing/2016/SVG/main" r:embed="rId3"/>
+              </a:ext>
+            </a:extLst>
+          </a:blip>
+          <a:stretch>
+            <a:fillRect/>
+          </a:stretch>
+        </p:blipFill>
+        <p:spPr>
+          <a:xfrm>
+            <a:off x="5045006" y="6356057"/>
+            <a:ext cx="6409575" cy="363174"/>
+          </a:xfrm>
+          <a:prstGeom prst="rect">
+            <a:avLst/>
+          </a:prstGeom>
+        </p:spPr>
+      </p:pic>
+      <p:sp>
+        <p:nvSpPr>
+          <p:cNvPr id="84" name="Marcador de número de diapositiva 83">
+            <a:extLst>
+              <a:ext uri="{FF2B5EF4-FFF2-40B4-BE49-F238E27FC236}">
+                <a16:creationId xmlns:a16="http://schemas.microsoft.com/office/drawing/2014/main" id="{696E3846-1BD2-4F23-48AA-C7AF2A1EE6EB}"/>
+              </a:ext>
+            </a:extLst>
+          </p:cNvPr>
+          <p:cNvSpPr>
+            <a:spLocks noGrp="1"/>
+          </p:cNvSpPr>
+          <p:nvPr>
+            <p:ph type="sldNum" sz="quarter" idx="7"/>
+          </p:nvPr>
+        </p:nvSpPr>
+        <p:spPr/>
+        <p:txBody>
+          <a:bodyPr/>
+          <a:lstStyle/>
+          <a:p>
+            <a:fld id="{B6F15528-21DE-4FAA-801E-634DDDAF4B2B}" type="slidenum">
+              <a:rPr lang="es-ES" smtClean="0"/>
+              <a:t>4</a:t>
+            </a:fld>
+            <a:endParaRPr lang="es-ES"/>
+          </a:p>
+        </p:txBody>
+      </p:sp>
+      <p:sp>
+        <p:nvSpPr>
+          <p:cNvPr id="3" name="Marcador de pie de página 2">
+            <a:extLst>
+              <a:ext uri="{FF2B5EF4-FFF2-40B4-BE49-F238E27FC236}">
+                <a16:creationId xmlns:a16="http://schemas.microsoft.com/office/drawing/2014/main" id="{E32C0E2B-75B6-4768-A4C7-F165A264DA0B}"/>
+              </a:ext>
+            </a:extLst>
+          </p:cNvPr>
+          <p:cNvSpPr>
+            <a:spLocks noGrp="1"/>
+          </p:cNvSpPr>
+          <p:nvPr>
+            <p:ph type="ftr" sz="quarter" idx="5"/>
+          </p:nvPr>
+        </p:nvSpPr>
+        <p:spPr/>
+        <p:txBody>
+          <a:bodyPr/>
+          <a:lstStyle/>
+          <a:p>
+            <a:pPr marL="12700">
+              <a:spcBef>
+                <a:spcPts val="15"/>
+              </a:spcBef>
+            </a:pPr>
+            <a:r>
+              <a:rPr lang="es-ES" spc="-5"/>
+              <a:t>LAB 1.0 WAVEGUIDES</a:t>
+            </a:r>
+            <a:endParaRPr lang="es-ES" spc="-5" dirty="0"/>
+          </a:p>
+        </p:txBody>
+      </p:sp>
+      <p:sp>
+        <p:nvSpPr>
+          <p:cNvPr id="2" name="CuadroTexto 1">
+            <a:extLst>
+              <a:ext uri="{FF2B5EF4-FFF2-40B4-BE49-F238E27FC236}">
+                <a16:creationId xmlns:a16="http://schemas.microsoft.com/office/drawing/2014/main" id="{82A62DD6-5488-72A1-9926-0CAEE59089A9}"/>
+              </a:ext>
+            </a:extLst>
+          </p:cNvPr>
+          <p:cNvSpPr txBox="1"/>
+          <p:nvPr/>
+        </p:nvSpPr>
+        <p:spPr>
+          <a:xfrm>
+            <a:off x="609441" y="4860334"/>
+            <a:ext cx="11199971" cy="1200329"/>
+          </a:xfrm>
+          <a:prstGeom prst="rect">
+            <a:avLst/>
+          </a:prstGeom>
+          <a:solidFill>
+            <a:schemeClr val="bg1">
+              <a:lumMod val="95000"/>
+            </a:schemeClr>
+          </a:solidFill>
+          <a:ln w="28575">
+            <a:solidFill>
+              <a:srgbClr val="E0700D"/>
+            </a:solidFill>
+          </a:ln>
+        </p:spPr>
+        <p:txBody>
+          <a:bodyPr wrap="square" rtlCol="0">
+            <a:spAutoFit/>
+          </a:bodyPr>
+          <a:lstStyle/>
+          <a:p>
+            <a:pPr algn="just"/>
+            <a:r>
+              <a:rPr lang="en-US" sz="1200" dirty="0">
+                <a:latin typeface="Arial" panose="020B0604020202020204" pitchFamily="34" charset="0"/>
+                <a:cs typeface="Arial" panose="020B0604020202020204" pitchFamily="34" charset="0"/>
+              </a:rPr>
+              <a:t>Comment results (neff changes this way with width, polarization behavior, </a:t>
+            </a:r>
+            <a:r>
+              <a:rPr lang="en-US" sz="1200" dirty="0" err="1">
+                <a:latin typeface="Arial" panose="020B0604020202020204" pitchFamily="34" charset="0"/>
+                <a:cs typeface="Arial" panose="020B0604020202020204" pitchFamily="34" charset="0"/>
+              </a:rPr>
+              <a:t>etc</a:t>
+            </a:r>
+            <a:r>
+              <a:rPr lang="en-US" sz="1200" dirty="0">
+                <a:latin typeface="Arial" panose="020B0604020202020204" pitchFamily="34" charset="0"/>
+                <a:cs typeface="Arial" panose="020B0604020202020204" pitchFamily="34" charset="0"/>
+              </a:rPr>
+              <a:t>…)</a:t>
+            </a:r>
+          </a:p>
+          <a:p>
+            <a:pPr algn="just"/>
+            <a:endParaRPr lang="en-US" sz="1200" dirty="0">
+              <a:latin typeface="Arial" panose="020B0604020202020204" pitchFamily="34" charset="0"/>
+              <a:cs typeface="Arial" panose="020B0604020202020204" pitchFamily="34" charset="0"/>
+            </a:endParaRPr>
+          </a:p>
+          <a:p>
+            <a:pPr algn="just"/>
+            <a:endParaRPr lang="en-US" sz="1200" dirty="0">
+              <a:latin typeface="Arial" panose="020B0604020202020204" pitchFamily="34" charset="0"/>
+              <a:cs typeface="Arial" panose="020B0604020202020204" pitchFamily="34" charset="0"/>
+            </a:endParaRPr>
+          </a:p>
+          <a:p>
+            <a:pPr algn="just"/>
+            <a:endParaRPr lang="en-US" sz="1200" dirty="0">
+              <a:latin typeface="Arial" panose="020B0604020202020204" pitchFamily="34" charset="0"/>
+              <a:cs typeface="Arial" panose="020B0604020202020204" pitchFamily="34" charset="0"/>
+            </a:endParaRPr>
+          </a:p>
+          <a:p>
+            <a:pPr algn="just"/>
+            <a:endParaRPr lang="en-US" sz="1200" dirty="0">
+              <a:latin typeface="Arial" panose="020B0604020202020204" pitchFamily="34" charset="0"/>
+              <a:cs typeface="Arial" panose="020B0604020202020204" pitchFamily="34" charset="0"/>
+            </a:endParaRPr>
+          </a:p>
+          <a:p>
+            <a:pPr algn="just"/>
+            <a:endParaRPr lang="en-US" sz="1200" dirty="0">
+              <a:latin typeface="Arial" panose="020B0604020202020204" pitchFamily="34" charset="0"/>
+              <a:cs typeface="Arial" panose="020B0604020202020204" pitchFamily="34" charset="0"/>
+            </a:endParaRPr>
+          </a:p>
+        </p:txBody>
+      </p:sp>
+      <p:sp>
+        <p:nvSpPr>
+          <p:cNvPr id="7" name="Rectángulo 6">
+            <a:extLst>
+              <a:ext uri="{FF2B5EF4-FFF2-40B4-BE49-F238E27FC236}">
+                <a16:creationId xmlns:a16="http://schemas.microsoft.com/office/drawing/2014/main" id="{FBC7D187-267A-ADD4-764C-D3820B8ED302}"/>
+              </a:ext>
+            </a:extLst>
+          </p:cNvPr>
+          <p:cNvSpPr/>
+          <p:nvPr/>
+        </p:nvSpPr>
+        <p:spPr>
+          <a:xfrm>
+            <a:off x="609441" y="1418373"/>
+            <a:ext cx="11199971" cy="3306028"/>
+          </a:xfrm>
+          <a:prstGeom prst="rect">
+            <a:avLst/>
+          </a:prstGeom>
+          <a:noFill/>
+          <a:ln w="28575">
+            <a:solidFill>
+              <a:srgbClr val="E0700D"/>
+            </a:solidFill>
+          </a:ln>
+        </p:spPr>
+        <p:style>
+          <a:lnRef idx="2">
+            <a:schemeClr val="accent1">
+              <a:shade val="15000"/>
+            </a:schemeClr>
+          </a:lnRef>
+          <a:fillRef idx="1">
+            <a:schemeClr val="accent1"/>
+          </a:fillRef>
+          <a:effectRef idx="0">
+            <a:schemeClr val="accent1"/>
+          </a:effectRef>
+          <a:fontRef idx="minor">
+            <a:schemeClr val="lt1"/>
+          </a:fontRef>
+        </p:style>
+        <p:txBody>
+          <a:bodyPr rtlCol="0" anchor="ctr"/>
+          <a:lstStyle/>
+          <a:p>
+            <a:pPr algn="ctr"/>
+            <a:endParaRPr lang="en-US"/>
+          </a:p>
+        </p:txBody>
+      </p:sp>
+      <p:sp>
+        <p:nvSpPr>
+          <p:cNvPr id="8" name="CuadroTexto 7">
+            <a:extLst>
+              <a:ext uri="{FF2B5EF4-FFF2-40B4-BE49-F238E27FC236}">
+                <a16:creationId xmlns:a16="http://schemas.microsoft.com/office/drawing/2014/main" id="{1EF5BFDA-8EC1-8C73-A932-F36C4DB93C73}"/>
+              </a:ext>
+            </a:extLst>
+          </p:cNvPr>
+          <p:cNvSpPr txBox="1"/>
+          <p:nvPr/>
+        </p:nvSpPr>
+        <p:spPr>
+          <a:xfrm>
+            <a:off x="2286000" y="2671278"/>
+            <a:ext cx="7718580" cy="923330"/>
+          </a:xfrm>
+          <a:prstGeom prst="rect">
+            <a:avLst/>
+          </a:prstGeom>
+          <a:noFill/>
+        </p:spPr>
+        <p:txBody>
+          <a:bodyPr wrap="square" rtlCol="0">
+            <a:spAutoFit/>
+          </a:bodyPr>
+          <a:lstStyle/>
+          <a:p>
+            <a:pPr algn="ctr"/>
+            <a:r>
+              <a:rPr lang="en-US" b="1" dirty="0"/>
+              <a:t>deep</a:t>
+            </a:r>
+            <a:r>
+              <a:rPr lang="en-US" dirty="0"/>
+              <a:t> waveguide</a:t>
+            </a:r>
+          </a:p>
+          <a:p>
+            <a:pPr algn="ctr"/>
+            <a:endParaRPr lang="en-US" dirty="0"/>
+          </a:p>
+          <a:p>
+            <a:pPr algn="ctr"/>
+            <a:r>
+              <a:rPr lang="en-US" dirty="0"/>
+              <a:t>Paste plot here</a:t>
+            </a:r>
+          </a:p>
+        </p:txBody>
+      </p:sp>
+    </p:spTree>
+    <p:extLst>
+      <p:ext uri="{BB962C8B-B14F-4D97-AF65-F5344CB8AC3E}">
+        <p14:creationId xmlns:p14="http://schemas.microsoft.com/office/powerpoint/2010/main" val="2900117438"/>
+      </p:ext>
+    </p:extLst>
+  </p:cSld>
+  <p:clrMapOvr>
+    <a:masterClrMapping/>
+  </p:clrMapOvr>
+</p:sld>
+</file>
+
+<file path=ppt/slides/slide5.xml><?xml version="1.0" encoding="utf-8"?>
+<p:sld xmlns:a="http://schemas.openxmlformats.org/drawingml/2006/main" xmlns:r="http://schemas.openxmlformats.org/officeDocument/2006/relationships" xmlns:p="http://schemas.openxmlformats.org/presentationml/2006/main">
+  <p:cSld>
+    <p:spTree>
+      <p:nvGrpSpPr>
+        <p:cNvPr id="1" name="">
+          <a:extLst>
+            <a:ext uri="{FF2B5EF4-FFF2-40B4-BE49-F238E27FC236}">
               <a16:creationId xmlns:a16="http://schemas.microsoft.com/office/drawing/2014/main" id="{371656EC-E197-239C-60DD-C11F7BA4B44A}"/>
             </a:ext>
           </a:extLst>
@@ -5337,7 +5625,7 @@
             </a:pPr>
             <a:r>
               <a:rPr lang="en-US" sz="2500" dirty="0"/>
-              <a:t>Learning outcome #2 – Wavelength behavior</a:t>
+              <a:t>Learning outcome #3 – Wavelength behavior</a:t>
             </a:r>
             <a:br>
               <a:rPr lang="es-ES" sz="2500" spc="-5" dirty="0">
@@ -5415,7 +5703,7 @@
           <a:p>
             <a:fld id="{B6F15528-21DE-4FAA-801E-634DDDAF4B2B}" type="slidenum">
               <a:rPr lang="es-ES" smtClean="0"/>
-              <a:t>4</a:t>
+              <a:t>5</a:t>
             </a:fld>
             <a:endParaRPr lang="es-ES"/>
           </a:p>
@@ -5802,401 +6090,6 @@
     <p:extLst>
       <p:ext uri="{BB962C8B-B14F-4D97-AF65-F5344CB8AC3E}">
         <p14:creationId xmlns:p14="http://schemas.microsoft.com/office/powerpoint/2010/main" val="3712356003"/>
-      </p:ext>
-    </p:extLst>
-  </p:cSld>
-  <p:clrMapOvr>
-    <a:masterClrMapping/>
-  </p:clrMapOvr>
-</p:sld>
-</file>
-
-<file path=ppt/slides/slide5.xml><?xml version="1.0" encoding="utf-8"?>
-<p:sld xmlns:a="http://schemas.openxmlformats.org/drawingml/2006/main" xmlns:r="http://schemas.openxmlformats.org/officeDocument/2006/relationships" xmlns:p="http://schemas.openxmlformats.org/presentationml/2006/main">
-  <p:cSld>
-    <p:spTree>
-      <p:nvGrpSpPr>
-        <p:cNvPr id="1" name="">
-          <a:extLst>
-            <a:ext uri="{FF2B5EF4-FFF2-40B4-BE49-F238E27FC236}">
-              <a16:creationId xmlns:a16="http://schemas.microsoft.com/office/drawing/2014/main" id="{0D90AC3D-36B7-D786-3825-B4DD6EADD689}"/>
-            </a:ext>
-          </a:extLst>
-        </p:cNvPr>
-        <p:cNvGrpSpPr/>
-        <p:nvPr/>
-      </p:nvGrpSpPr>
-      <p:grpSpPr>
-        <a:xfrm>
-          <a:off x="0" y="0"/>
-          <a:ext cx="0" cy="0"/>
-          <a:chOff x="0" y="0"/>
-          <a:chExt cx="0" cy="0"/>
-        </a:xfrm>
-      </p:grpSpPr>
-      <p:sp>
-        <p:nvSpPr>
-          <p:cNvPr id="16" name="object 16">
-            <a:extLst>
-              <a:ext uri="{FF2B5EF4-FFF2-40B4-BE49-F238E27FC236}">
-                <a16:creationId xmlns:a16="http://schemas.microsoft.com/office/drawing/2014/main" id="{6AA2E789-F7AE-F068-274C-E0F13A22DBCA}"/>
-              </a:ext>
-            </a:extLst>
-          </p:cNvPr>
-          <p:cNvSpPr txBox="1">
-            <a:spLocks noGrp="1"/>
-          </p:cNvSpPr>
-          <p:nvPr>
-            <p:ph type="title"/>
-          </p:nvPr>
-        </p:nvSpPr>
-        <p:spPr>
-          <a:xfrm>
-            <a:off x="685800" y="408883"/>
-            <a:ext cx="10994410" cy="705321"/>
-          </a:xfrm>
-          <a:prstGeom prst="rect">
-            <a:avLst/>
-          </a:prstGeom>
-        </p:spPr>
-        <p:txBody>
-          <a:bodyPr vert="horz" wrap="square" lIns="0" tIns="12700" rIns="0" bIns="0" rtlCol="0">
-            <a:spAutoFit/>
-          </a:bodyPr>
-          <a:lstStyle/>
-          <a:p>
-            <a:pPr marL="12700">
-              <a:lnSpc>
-                <a:spcPct val="100000"/>
-              </a:lnSpc>
-              <a:spcBef>
-                <a:spcPts val="100"/>
-              </a:spcBef>
-            </a:pPr>
-            <a:r>
-              <a:rPr lang="en-US" sz="2500" dirty="0"/>
-              <a:t>Learning outcome #3 – Width dependence</a:t>
-            </a:r>
-            <a:br>
-              <a:rPr lang="es-ES" sz="2500" spc="-5" dirty="0">
-                <a:latin typeface="+mj-lt"/>
-                <a:cs typeface="Lucida Sans"/>
-              </a:rPr>
-            </a:br>
-            <a:r>
-              <a:rPr lang="en-US" b="0" dirty="0"/>
-              <a:t>Width 0.6 - 1.6 µm (step 0.1 µm) – Wavelength 1.55 µm </a:t>
-            </a:r>
-            <a:endParaRPr sz="2500" b="0" dirty="0">
-              <a:latin typeface="+mj-lt"/>
-              <a:cs typeface="Lucida Sans"/>
-            </a:endParaRPr>
-          </a:p>
-        </p:txBody>
-      </p:sp>
-      <p:pic>
-        <p:nvPicPr>
-          <p:cNvPr id="83" name="Gráfico 82">
-            <a:extLst>
-              <a:ext uri="{FF2B5EF4-FFF2-40B4-BE49-F238E27FC236}">
-                <a16:creationId xmlns:a16="http://schemas.microsoft.com/office/drawing/2014/main" id="{3AEAD01B-7604-8009-5694-A556497AEF25}"/>
-              </a:ext>
-            </a:extLst>
-          </p:cNvPr>
-          <p:cNvPicPr>
-            <a:picLocks noChangeAspect="1"/>
-          </p:cNvPicPr>
-          <p:nvPr/>
-        </p:nvPicPr>
-        <p:blipFill>
-          <a:blip>
-            <a:extLst>
-              <a:ext uri="{96DAC541-7B7A-43D3-8B79-37D633B846F1}">
-                <asvg:svgBlip xmlns:asvg="http://schemas.microsoft.com/office/drawing/2016/SVG/main" r:embed="rId3"/>
-              </a:ext>
-            </a:extLst>
-          </a:blip>
-          <a:stretch>
-            <a:fillRect/>
-          </a:stretch>
-        </p:blipFill>
-        <p:spPr>
-          <a:xfrm>
-            <a:off x="5045006" y="6356057"/>
-            <a:ext cx="6409575" cy="363174"/>
-          </a:xfrm>
-          <a:prstGeom prst="rect">
-            <a:avLst/>
-          </a:prstGeom>
-        </p:spPr>
-      </p:pic>
-      <p:sp>
-        <p:nvSpPr>
-          <p:cNvPr id="84" name="Marcador de número de diapositiva 83">
-            <a:extLst>
-              <a:ext uri="{FF2B5EF4-FFF2-40B4-BE49-F238E27FC236}">
-                <a16:creationId xmlns:a16="http://schemas.microsoft.com/office/drawing/2014/main" id="{696E3846-1BD2-4F23-48AA-C7AF2A1EE6EB}"/>
-              </a:ext>
-            </a:extLst>
-          </p:cNvPr>
-          <p:cNvSpPr>
-            <a:spLocks noGrp="1"/>
-          </p:cNvSpPr>
-          <p:nvPr>
-            <p:ph type="sldNum" sz="quarter" idx="7"/>
-          </p:nvPr>
-        </p:nvSpPr>
-        <p:spPr/>
-        <p:txBody>
-          <a:bodyPr/>
-          <a:lstStyle/>
-          <a:p>
-            <a:fld id="{B6F15528-21DE-4FAA-801E-634DDDAF4B2B}" type="slidenum">
-              <a:rPr lang="es-ES" smtClean="0"/>
-              <a:t>5</a:t>
-            </a:fld>
-            <a:endParaRPr lang="es-ES"/>
-          </a:p>
-        </p:txBody>
-      </p:sp>
-      <p:sp>
-        <p:nvSpPr>
-          <p:cNvPr id="3" name="Marcador de pie de página 2">
-            <a:extLst>
-              <a:ext uri="{FF2B5EF4-FFF2-40B4-BE49-F238E27FC236}">
-                <a16:creationId xmlns:a16="http://schemas.microsoft.com/office/drawing/2014/main" id="{E32C0E2B-75B6-4768-A4C7-F165A264DA0B}"/>
-              </a:ext>
-            </a:extLst>
-          </p:cNvPr>
-          <p:cNvSpPr>
-            <a:spLocks noGrp="1"/>
-          </p:cNvSpPr>
-          <p:nvPr>
-            <p:ph type="ftr" sz="quarter" idx="5"/>
-          </p:nvPr>
-        </p:nvSpPr>
-        <p:spPr/>
-        <p:txBody>
-          <a:bodyPr/>
-          <a:lstStyle/>
-          <a:p>
-            <a:pPr marL="12700">
-              <a:spcBef>
-                <a:spcPts val="15"/>
-              </a:spcBef>
-            </a:pPr>
-            <a:r>
-              <a:rPr lang="es-ES" spc="-5"/>
-              <a:t>LAB 1.0 WAVEGUIDES</a:t>
-            </a:r>
-            <a:endParaRPr lang="es-ES" spc="-5" dirty="0"/>
-          </a:p>
-        </p:txBody>
-      </p:sp>
-      <p:sp>
-        <p:nvSpPr>
-          <p:cNvPr id="2" name="CuadroTexto 1">
-            <a:extLst>
-              <a:ext uri="{FF2B5EF4-FFF2-40B4-BE49-F238E27FC236}">
-                <a16:creationId xmlns:a16="http://schemas.microsoft.com/office/drawing/2014/main" id="{82A62DD6-5488-72A1-9926-0CAEE59089A9}"/>
-              </a:ext>
-            </a:extLst>
-          </p:cNvPr>
-          <p:cNvSpPr txBox="1"/>
-          <p:nvPr/>
-        </p:nvSpPr>
-        <p:spPr>
-          <a:xfrm>
-            <a:off x="609441" y="4860334"/>
-            <a:ext cx="11199971" cy="1200329"/>
-          </a:xfrm>
-          <a:prstGeom prst="rect">
-            <a:avLst/>
-          </a:prstGeom>
-          <a:solidFill>
-            <a:schemeClr val="bg1">
-              <a:lumMod val="95000"/>
-            </a:schemeClr>
-          </a:solidFill>
-          <a:ln w="28575">
-            <a:solidFill>
-              <a:srgbClr val="E0700D"/>
-            </a:solidFill>
-          </a:ln>
-        </p:spPr>
-        <p:txBody>
-          <a:bodyPr wrap="square" rtlCol="0">
-            <a:spAutoFit/>
-          </a:bodyPr>
-          <a:lstStyle/>
-          <a:p>
-            <a:pPr algn="just"/>
-            <a:r>
-              <a:rPr lang="en-US" sz="1200" dirty="0">
-                <a:latin typeface="Arial" panose="020B0604020202020204" pitchFamily="34" charset="0"/>
-                <a:cs typeface="Arial" panose="020B0604020202020204" pitchFamily="34" charset="0"/>
-              </a:rPr>
-              <a:t>Comment results (neff changes this way with width, polarization behavior, </a:t>
-            </a:r>
-            <a:r>
-              <a:rPr lang="en-US" sz="1200" dirty="0" err="1">
-                <a:latin typeface="Arial" panose="020B0604020202020204" pitchFamily="34" charset="0"/>
-                <a:cs typeface="Arial" panose="020B0604020202020204" pitchFamily="34" charset="0"/>
-              </a:rPr>
-              <a:t>etc</a:t>
-            </a:r>
-            <a:r>
-              <a:rPr lang="en-US" sz="1200" dirty="0">
-                <a:latin typeface="Arial" panose="020B0604020202020204" pitchFamily="34" charset="0"/>
-                <a:cs typeface="Arial" panose="020B0604020202020204" pitchFamily="34" charset="0"/>
-              </a:rPr>
-              <a:t>…)</a:t>
-            </a:r>
-          </a:p>
-          <a:p>
-            <a:pPr algn="just"/>
-            <a:endParaRPr lang="en-US" sz="1200" dirty="0">
-              <a:latin typeface="Arial" panose="020B0604020202020204" pitchFamily="34" charset="0"/>
-              <a:cs typeface="Arial" panose="020B0604020202020204" pitchFamily="34" charset="0"/>
-            </a:endParaRPr>
-          </a:p>
-          <a:p>
-            <a:pPr algn="just"/>
-            <a:endParaRPr lang="en-US" sz="1200" dirty="0">
-              <a:latin typeface="Arial" panose="020B0604020202020204" pitchFamily="34" charset="0"/>
-              <a:cs typeface="Arial" panose="020B0604020202020204" pitchFamily="34" charset="0"/>
-            </a:endParaRPr>
-          </a:p>
-          <a:p>
-            <a:pPr algn="just"/>
-            <a:endParaRPr lang="en-US" sz="1200" dirty="0">
-              <a:latin typeface="Arial" panose="020B0604020202020204" pitchFamily="34" charset="0"/>
-              <a:cs typeface="Arial" panose="020B0604020202020204" pitchFamily="34" charset="0"/>
-            </a:endParaRPr>
-          </a:p>
-          <a:p>
-            <a:pPr algn="just"/>
-            <a:endParaRPr lang="en-US" sz="1200" dirty="0">
-              <a:latin typeface="Arial" panose="020B0604020202020204" pitchFamily="34" charset="0"/>
-              <a:cs typeface="Arial" panose="020B0604020202020204" pitchFamily="34" charset="0"/>
-            </a:endParaRPr>
-          </a:p>
-          <a:p>
-            <a:pPr algn="just"/>
-            <a:endParaRPr lang="en-US" sz="1200" dirty="0">
-              <a:latin typeface="Arial" panose="020B0604020202020204" pitchFamily="34" charset="0"/>
-              <a:cs typeface="Arial" panose="020B0604020202020204" pitchFamily="34" charset="0"/>
-            </a:endParaRPr>
-          </a:p>
-        </p:txBody>
-      </p:sp>
-      <p:sp>
-        <p:nvSpPr>
-          <p:cNvPr id="7" name="Rectángulo 6">
-            <a:extLst>
-              <a:ext uri="{FF2B5EF4-FFF2-40B4-BE49-F238E27FC236}">
-                <a16:creationId xmlns:a16="http://schemas.microsoft.com/office/drawing/2014/main" id="{FBC7D187-267A-ADD4-764C-D3820B8ED302}"/>
-              </a:ext>
-            </a:extLst>
-          </p:cNvPr>
-          <p:cNvSpPr/>
-          <p:nvPr/>
-        </p:nvSpPr>
-        <p:spPr>
-          <a:xfrm>
-            <a:off x="609441" y="1418373"/>
-            <a:ext cx="11199971" cy="3306028"/>
-          </a:xfrm>
-          <a:prstGeom prst="rect">
-            <a:avLst/>
-          </a:prstGeom>
-          <a:noFill/>
-          <a:ln w="28575">
-            <a:solidFill>
-              <a:srgbClr val="E0700D"/>
-            </a:solidFill>
-          </a:ln>
-        </p:spPr>
-        <p:style>
-          <a:lnRef idx="2">
-            <a:schemeClr val="accent1">
-              <a:shade val="15000"/>
-            </a:schemeClr>
-          </a:lnRef>
-          <a:fillRef idx="1">
-            <a:schemeClr val="accent1"/>
-          </a:fillRef>
-          <a:effectRef idx="0">
-            <a:schemeClr val="accent1"/>
-          </a:effectRef>
-          <a:fontRef idx="minor">
-            <a:schemeClr val="lt1"/>
-          </a:fontRef>
-        </p:style>
-        <p:txBody>
-          <a:bodyPr rtlCol="0" anchor="ctr"/>
-          <a:lstStyle/>
-          <a:p>
-            <a:pPr algn="ctr"/>
-            <a:endParaRPr lang="en-US"/>
-          </a:p>
-        </p:txBody>
-      </p:sp>
-      <p:sp>
-        <p:nvSpPr>
-          <p:cNvPr id="8" name="CuadroTexto 7">
-            <a:extLst>
-              <a:ext uri="{FF2B5EF4-FFF2-40B4-BE49-F238E27FC236}">
-                <a16:creationId xmlns:a16="http://schemas.microsoft.com/office/drawing/2014/main" id="{1EF5BFDA-8EC1-8C73-A932-F36C4DB93C73}"/>
-              </a:ext>
-            </a:extLst>
-          </p:cNvPr>
-          <p:cNvSpPr txBox="1"/>
-          <p:nvPr/>
-        </p:nvSpPr>
-        <p:spPr>
-          <a:xfrm>
-            <a:off x="2286000" y="2671278"/>
-            <a:ext cx="7718580" cy="923330"/>
-          </a:xfrm>
-          <a:prstGeom prst="rect">
-            <a:avLst/>
-          </a:prstGeom>
-          <a:noFill/>
-        </p:spPr>
-        <p:txBody>
-          <a:bodyPr wrap="square" rtlCol="0">
-            <a:spAutoFit/>
-          </a:bodyPr>
-          <a:lstStyle/>
-          <a:p>
-            <a:pPr algn="ctr"/>
-            <a:r>
-              <a:rPr lang="en-US" b="1" dirty="0"/>
-              <a:t>deep</a:t>
-            </a:r>
-            <a:r>
-              <a:rPr lang="en-US" dirty="0"/>
-              <a:t> waveguide</a:t>
-            </a:r>
-          </a:p>
-          <a:p>
-            <a:pPr algn="ctr"/>
-            <a:endParaRPr lang="en-US" dirty="0"/>
-          </a:p>
-          <a:p>
-            <a:pPr algn="ctr"/>
-            <a:r>
-              <a:rPr lang="en-US" dirty="0"/>
-              <a:t>Paste plot here</a:t>
-            </a:r>
-          </a:p>
-        </p:txBody>
-      </p:sp>
-    </p:spTree>
-    <p:extLst>
-      <p:ext uri="{BB962C8B-B14F-4D97-AF65-F5344CB8AC3E}">
-        <p14:creationId xmlns:p14="http://schemas.microsoft.com/office/powerpoint/2010/main" val="2900117438"/>
       </p:ext>
     </p:extLst>
   </p:cSld>
@@ -7389,395 +7282,6 @@
   <p:cSld>
     <p:spTree>
       <p:nvGrpSpPr>
-        <p:cNvPr id="1" name="">
-          <a:extLst>
-            <a:ext uri="{FF2B5EF4-FFF2-40B4-BE49-F238E27FC236}">
-              <a16:creationId xmlns:a16="http://schemas.microsoft.com/office/drawing/2014/main" id="{25434E70-43B1-3881-1771-20FB4358471D}"/>
-            </a:ext>
-          </a:extLst>
-        </p:cNvPr>
-        <p:cNvGrpSpPr/>
-        <p:nvPr/>
-      </p:nvGrpSpPr>
-      <p:grpSpPr>
-        <a:xfrm>
-          <a:off x="0" y="0"/>
-          <a:ext cx="0" cy="0"/>
-          <a:chOff x="0" y="0"/>
-          <a:chExt cx="0" cy="0"/>
-        </a:xfrm>
-      </p:grpSpPr>
-      <p:sp>
-        <p:nvSpPr>
-          <p:cNvPr id="16" name="object 16">
-            <a:extLst>
-              <a:ext uri="{FF2B5EF4-FFF2-40B4-BE49-F238E27FC236}">
-                <a16:creationId xmlns:a16="http://schemas.microsoft.com/office/drawing/2014/main" id="{742C31CE-19F0-B995-0997-9A2D6A879BF7}"/>
-              </a:ext>
-            </a:extLst>
-          </p:cNvPr>
-          <p:cNvSpPr txBox="1">
-            <a:spLocks noGrp="1"/>
-          </p:cNvSpPr>
-          <p:nvPr>
-            <p:ph type="title"/>
-          </p:nvPr>
-        </p:nvSpPr>
-        <p:spPr>
-          <a:xfrm>
-            <a:off x="685800" y="408883"/>
-            <a:ext cx="10994410" cy="1090042"/>
-          </a:xfrm>
-          <a:prstGeom prst="rect">
-            <a:avLst/>
-          </a:prstGeom>
-        </p:spPr>
-        <p:txBody>
-          <a:bodyPr vert="horz" wrap="square" lIns="0" tIns="12700" rIns="0" bIns="0" rtlCol="0">
-            <a:spAutoFit/>
-          </a:bodyPr>
-          <a:lstStyle/>
-          <a:p>
-            <a:pPr marL="12700">
-              <a:lnSpc>
-                <a:spcPct val="100000"/>
-              </a:lnSpc>
-              <a:spcBef>
-                <a:spcPts val="100"/>
-              </a:spcBef>
-            </a:pPr>
-            <a:r>
-              <a:rPr lang="en-US" sz="2500" dirty="0"/>
-              <a:t>Learning outcome #5 – Bend waveguide radius vs. loss – deep</a:t>
-            </a:r>
-            <a:br>
-              <a:rPr lang="en-US" sz="2500" dirty="0"/>
-            </a:br>
-            <a:r>
-              <a:rPr lang="en-US" b="0" dirty="0"/>
-              <a:t>Find  neff_TE0 for </a:t>
-            </a:r>
-            <a:r>
-              <a:rPr lang="en-US" b="0" dirty="0" err="1"/>
-              <a:t>wvl</a:t>
-            </a:r>
-            <a:r>
-              <a:rPr lang="en-US" b="0" dirty="0"/>
-              <a:t> 1.55 µm, width 1.2 µm for R=25,50,75,100, 125,150 µm</a:t>
-            </a:r>
-            <a:br>
-              <a:rPr lang="en-US" sz="2500" dirty="0"/>
-            </a:br>
-            <a:endParaRPr lang="en-US" sz="2500" b="0" dirty="0">
-              <a:latin typeface="+mj-lt"/>
-              <a:cs typeface="Lucida Sans"/>
-            </a:endParaRPr>
-          </a:p>
-        </p:txBody>
-      </p:sp>
-      <p:pic>
-        <p:nvPicPr>
-          <p:cNvPr id="83" name="Gráfico 82">
-            <a:extLst>
-              <a:ext uri="{FF2B5EF4-FFF2-40B4-BE49-F238E27FC236}">
-                <a16:creationId xmlns:a16="http://schemas.microsoft.com/office/drawing/2014/main" id="{D688A609-F3DC-EE34-C536-683E70F32EAE}"/>
-              </a:ext>
-            </a:extLst>
-          </p:cNvPr>
-          <p:cNvPicPr>
-            <a:picLocks noChangeAspect="1"/>
-          </p:cNvPicPr>
-          <p:nvPr/>
-        </p:nvPicPr>
-        <p:blipFill>
-          <a:blip>
-            <a:extLst>
-              <a:ext uri="{96DAC541-7B7A-43D3-8B79-37D633B846F1}">
-                <asvg:svgBlip xmlns:asvg="http://schemas.microsoft.com/office/drawing/2016/SVG/main" r:embed="rId3"/>
-              </a:ext>
-            </a:extLst>
-          </a:blip>
-          <a:stretch>
-            <a:fillRect/>
-          </a:stretch>
-        </p:blipFill>
-        <p:spPr>
-          <a:xfrm>
-            <a:off x="5045006" y="6356057"/>
-            <a:ext cx="6409575" cy="363174"/>
-          </a:xfrm>
-          <a:prstGeom prst="rect">
-            <a:avLst/>
-          </a:prstGeom>
-        </p:spPr>
-      </p:pic>
-      <p:sp>
-        <p:nvSpPr>
-          <p:cNvPr id="84" name="Marcador de número de diapositiva 83">
-            <a:extLst>
-              <a:ext uri="{FF2B5EF4-FFF2-40B4-BE49-F238E27FC236}">
-                <a16:creationId xmlns:a16="http://schemas.microsoft.com/office/drawing/2014/main" id="{B6C672C6-89D4-7E67-2B94-811D081786A7}"/>
-              </a:ext>
-            </a:extLst>
-          </p:cNvPr>
-          <p:cNvSpPr>
-            <a:spLocks noGrp="1"/>
-          </p:cNvSpPr>
-          <p:nvPr>
-            <p:ph type="sldNum" sz="quarter" idx="7"/>
-          </p:nvPr>
-        </p:nvSpPr>
-        <p:spPr/>
-        <p:txBody>
-          <a:bodyPr/>
-          <a:lstStyle/>
-          <a:p>
-            <a:fld id="{B6F15528-21DE-4FAA-801E-634DDDAF4B2B}" type="slidenum">
-              <a:rPr lang="es-ES" smtClean="0"/>
-              <a:t>7</a:t>
-            </a:fld>
-            <a:endParaRPr lang="es-ES"/>
-          </a:p>
-        </p:txBody>
-      </p:sp>
-      <p:sp>
-        <p:nvSpPr>
-          <p:cNvPr id="3" name="Marcador de pie de página 2">
-            <a:extLst>
-              <a:ext uri="{FF2B5EF4-FFF2-40B4-BE49-F238E27FC236}">
-                <a16:creationId xmlns:a16="http://schemas.microsoft.com/office/drawing/2014/main" id="{AA1F4313-D710-7A3E-7A8F-EB77DEE3C1A7}"/>
-              </a:ext>
-            </a:extLst>
-          </p:cNvPr>
-          <p:cNvSpPr>
-            <a:spLocks noGrp="1"/>
-          </p:cNvSpPr>
-          <p:nvPr>
-            <p:ph type="ftr" sz="quarter" idx="5"/>
-          </p:nvPr>
-        </p:nvSpPr>
-        <p:spPr/>
-        <p:txBody>
-          <a:bodyPr/>
-          <a:lstStyle/>
-          <a:p>
-            <a:pPr marL="12700">
-              <a:spcBef>
-                <a:spcPts val="15"/>
-              </a:spcBef>
-            </a:pPr>
-            <a:r>
-              <a:rPr lang="es-ES" spc="-5"/>
-              <a:t>LAB 1.0 WAVEGUIDES</a:t>
-            </a:r>
-            <a:endParaRPr lang="es-ES" spc="-5" dirty="0"/>
-          </a:p>
-        </p:txBody>
-      </p:sp>
-      <p:sp>
-        <p:nvSpPr>
-          <p:cNvPr id="2" name="CuadroTexto 1">
-            <a:extLst>
-              <a:ext uri="{FF2B5EF4-FFF2-40B4-BE49-F238E27FC236}">
-                <a16:creationId xmlns:a16="http://schemas.microsoft.com/office/drawing/2014/main" id="{FDE3A197-9508-F9F1-1FEB-FF883D78C151}"/>
-              </a:ext>
-            </a:extLst>
-          </p:cNvPr>
-          <p:cNvSpPr txBox="1"/>
-          <p:nvPr/>
-        </p:nvSpPr>
-        <p:spPr>
-          <a:xfrm>
-            <a:off x="609441" y="4860334"/>
-            <a:ext cx="11199971" cy="1200329"/>
-          </a:xfrm>
-          <a:prstGeom prst="rect">
-            <a:avLst/>
-          </a:prstGeom>
-          <a:solidFill>
-            <a:schemeClr val="bg1">
-              <a:lumMod val="95000"/>
-            </a:schemeClr>
-          </a:solidFill>
-          <a:ln w="28575">
-            <a:solidFill>
-              <a:srgbClr val="E0700D"/>
-            </a:solidFill>
-          </a:ln>
-        </p:spPr>
-        <p:txBody>
-          <a:bodyPr wrap="square" rtlCol="0">
-            <a:spAutoFit/>
-          </a:bodyPr>
-          <a:lstStyle/>
-          <a:p>
-            <a:pPr algn="just"/>
-            <a:r>
-              <a:rPr lang="en-US" sz="1200" dirty="0">
-                <a:latin typeface="Arial" panose="020B0604020202020204" pitchFamily="34" charset="0"/>
-                <a:cs typeface="Arial" panose="020B0604020202020204" pitchFamily="34" charset="0"/>
-              </a:rPr>
-              <a:t>Comment results, which is the safe radius?, consider safe means less than 0.1 dB/90º.</a:t>
-            </a:r>
-          </a:p>
-          <a:p>
-            <a:pPr algn="just"/>
-            <a:endParaRPr lang="en-US" sz="1200" u="sng" dirty="0">
-              <a:latin typeface="Arial" panose="020B0604020202020204" pitchFamily="34" charset="0"/>
-              <a:cs typeface="Arial" panose="020B0604020202020204" pitchFamily="34" charset="0"/>
-            </a:endParaRPr>
-          </a:p>
-          <a:p>
-            <a:pPr algn="just"/>
-            <a:endParaRPr lang="en-US" sz="1200" dirty="0">
-              <a:latin typeface="Arial" panose="020B0604020202020204" pitchFamily="34" charset="0"/>
-              <a:cs typeface="Arial" panose="020B0604020202020204" pitchFamily="34" charset="0"/>
-            </a:endParaRPr>
-          </a:p>
-          <a:p>
-            <a:pPr algn="just"/>
-            <a:endParaRPr lang="en-US" sz="1200" dirty="0">
-              <a:latin typeface="Arial" panose="020B0604020202020204" pitchFamily="34" charset="0"/>
-              <a:cs typeface="Arial" panose="020B0604020202020204" pitchFamily="34" charset="0"/>
-            </a:endParaRPr>
-          </a:p>
-          <a:p>
-            <a:pPr algn="just"/>
-            <a:endParaRPr lang="en-US" sz="1200" dirty="0">
-              <a:latin typeface="Arial" panose="020B0604020202020204" pitchFamily="34" charset="0"/>
-              <a:cs typeface="Arial" panose="020B0604020202020204" pitchFamily="34" charset="0"/>
-            </a:endParaRPr>
-          </a:p>
-          <a:p>
-            <a:pPr algn="just"/>
-            <a:endParaRPr lang="en-US" sz="1200" dirty="0">
-              <a:latin typeface="Arial" panose="020B0604020202020204" pitchFamily="34" charset="0"/>
-              <a:cs typeface="Arial" panose="020B0604020202020204" pitchFamily="34" charset="0"/>
-            </a:endParaRPr>
-          </a:p>
-        </p:txBody>
-      </p:sp>
-      <p:sp>
-        <p:nvSpPr>
-          <p:cNvPr id="7" name="Rectángulo 6">
-            <a:extLst>
-              <a:ext uri="{FF2B5EF4-FFF2-40B4-BE49-F238E27FC236}">
-                <a16:creationId xmlns:a16="http://schemas.microsoft.com/office/drawing/2014/main" id="{B5FE8755-B0BF-14B7-64E6-4BBB2560B9A6}"/>
-              </a:ext>
-            </a:extLst>
-          </p:cNvPr>
-          <p:cNvSpPr/>
-          <p:nvPr/>
-        </p:nvSpPr>
-        <p:spPr>
-          <a:xfrm>
-            <a:off x="609441" y="1418373"/>
-            <a:ext cx="11199971" cy="3306028"/>
-          </a:xfrm>
-          <a:prstGeom prst="rect">
-            <a:avLst/>
-          </a:prstGeom>
-          <a:noFill/>
-          <a:ln w="28575">
-            <a:solidFill>
-              <a:srgbClr val="E0700D"/>
-            </a:solidFill>
-          </a:ln>
-        </p:spPr>
-        <p:style>
-          <a:lnRef idx="2">
-            <a:schemeClr val="accent1">
-              <a:shade val="15000"/>
-            </a:schemeClr>
-          </a:lnRef>
-          <a:fillRef idx="1">
-            <a:schemeClr val="accent1"/>
-          </a:fillRef>
-          <a:effectRef idx="0">
-            <a:schemeClr val="accent1"/>
-          </a:effectRef>
-          <a:fontRef idx="minor">
-            <a:schemeClr val="lt1"/>
-          </a:fontRef>
-        </p:style>
-        <p:txBody>
-          <a:bodyPr rtlCol="0" anchor="ctr"/>
-          <a:lstStyle/>
-          <a:p>
-            <a:pPr algn="ctr"/>
-            <a:endParaRPr lang="en-US"/>
-          </a:p>
-        </p:txBody>
-      </p:sp>
-      <p:sp>
-        <p:nvSpPr>
-          <p:cNvPr id="8" name="CuadroTexto 7">
-            <a:extLst>
-              <a:ext uri="{FF2B5EF4-FFF2-40B4-BE49-F238E27FC236}">
-                <a16:creationId xmlns:a16="http://schemas.microsoft.com/office/drawing/2014/main" id="{331EBD86-BA6C-68C9-2D38-FC8CFBA7ADC4}"/>
-              </a:ext>
-            </a:extLst>
-          </p:cNvPr>
-          <p:cNvSpPr txBox="1"/>
-          <p:nvPr/>
-        </p:nvSpPr>
-        <p:spPr>
-          <a:xfrm>
-            <a:off x="2978141" y="2784355"/>
-            <a:ext cx="6235717" cy="923330"/>
-          </a:xfrm>
-          <a:prstGeom prst="rect">
-            <a:avLst/>
-          </a:prstGeom>
-          <a:noFill/>
-        </p:spPr>
-        <p:txBody>
-          <a:bodyPr wrap="square" rtlCol="0">
-            <a:spAutoFit/>
-          </a:bodyPr>
-          <a:lstStyle/>
-          <a:p>
-            <a:pPr algn="ctr"/>
-            <a:r>
-              <a:rPr lang="en-US" b="1" dirty="0"/>
-              <a:t>deep</a:t>
-            </a:r>
-            <a:r>
-              <a:rPr lang="en-US" dirty="0"/>
-              <a:t> waveguide</a:t>
-            </a:r>
-          </a:p>
-          <a:p>
-            <a:pPr algn="ctr"/>
-            <a:endParaRPr lang="en-US" dirty="0"/>
-          </a:p>
-          <a:p>
-            <a:pPr algn="ctr"/>
-            <a:r>
-              <a:rPr lang="en-US" dirty="0"/>
-              <a:t>Paste Total Loss (dB/90º) vs R &amp; neff_TE0 vs R</a:t>
-            </a:r>
-          </a:p>
-        </p:txBody>
-      </p:sp>
-    </p:spTree>
-    <p:extLst>
-      <p:ext uri="{BB962C8B-B14F-4D97-AF65-F5344CB8AC3E}">
-        <p14:creationId xmlns:p14="http://schemas.microsoft.com/office/powerpoint/2010/main" val="3660438245"/>
-      </p:ext>
-    </p:extLst>
-  </p:cSld>
-  <p:clrMapOvr>
-    <a:masterClrMapping/>
-  </p:clrMapOvr>
-</p:sld>
-</file>
-
-<file path=ppt/slides/slide8.xml><?xml version="1.0" encoding="utf-8"?>
-<p:sld xmlns:a="http://schemas.openxmlformats.org/drawingml/2006/main" xmlns:r="http://schemas.openxmlformats.org/officeDocument/2006/relationships" xmlns:p="http://schemas.openxmlformats.org/presentationml/2006/main">
-  <p:cSld>
-    <p:spTree>
-      <p:nvGrpSpPr>
         <p:cNvPr id="1" name=""/>
         <p:cNvGrpSpPr/>
         <p:nvPr/>
@@ -7912,7 +7416,7 @@
           <a:p>
             <a:fld id="{B6F15528-21DE-4FAA-801E-634DDDAF4B2B}" type="slidenum">
               <a:rPr lang="es-ES" smtClean="0"/>
-              <a:t>8</a:t>
+              <a:t>7</a:t>
             </a:fld>
             <a:endParaRPr lang="es-ES"/>
           </a:p>
